--- a/03-课件PPT/讲次版/第4章-1-讲次 4-1 · Context Engineering.pptx
+++ b/03-课件PPT/讲次版/第4章-1-讲次 4-1 · Context Engineering.pptx
@@ -4804,46 +4804,7 @@
       </p:sp>
       <p:sp>
         <p:nvSpPr>
-          <p:cNvPr id="5" name="TextBox 4"/>
-          <p:cNvSpPr txBox="1"/>
-          <p:nvPr/>
-        </p:nvSpPr>
-        <p:spPr>
-          <a:xfrm>
-            <a:off x="9334500" y="0"/>
-            <a:ext cx="2667000" cy="704850"/>
-          </a:xfrm>
-          <a:prstGeom prst="rect">
-            <a:avLst/>
-          </a:prstGeom>
-          <a:noFill/>
-        </p:spPr>
-        <p:txBody>
-          <a:bodyPr wrap="square" anchor="ctr">
-            <a:spAutoFit/>
-          </a:bodyPr>
-          <a:lstStyle/>
-          <a:p>
-            <a:pPr algn="r">
-              <a:lnSpc>
-                <a:spcPct val="100000"/>
-              </a:lnSpc>
-            </a:pPr>
-            <a:r>
-              <a:rPr sz="1100" b="0">
-                <a:solidFill>
-                  <a:srgbClr val="94A3B8"/>
-                </a:solidFill>
-                <a:latin typeface="PingFang SC"/>
-              </a:rPr>
-              <a:t>头尾:system+最新观察(高保留);中段:历史与长引用(压缩区);外部:原始数据(不进窗)|lost-in-the-middle 实证</a:t>
-            </a:r>
-          </a:p>
-        </p:txBody>
-      </p:sp>
-      <p:sp>
-        <p:nvSpPr>
-          <p:cNvPr id="6" name="Rounded Rectangle 5"/>
+          <p:cNvPr id="5" name="Rounded Rectangle 4"/>
           <p:cNvSpPr/>
           <p:nvPr/>
         </p:nvSpPr>
@@ -4891,7 +4852,7 @@
       </p:sp>
       <p:sp>
         <p:nvSpPr>
-          <p:cNvPr id="7" name="Rectangle 6"/>
+          <p:cNvPr id="6" name="Rectangle 5"/>
           <p:cNvSpPr/>
           <p:nvPr/>
         </p:nvSpPr>
@@ -4935,7 +4896,7 @@
       </p:sp>
       <p:sp>
         <p:nvSpPr>
-          <p:cNvPr id="8" name="TextBox 7"/>
+          <p:cNvPr id="7" name="TextBox 6"/>
           <p:cNvSpPr txBox="1"/>
           <p:nvPr/>
         </p:nvSpPr>
@@ -4974,7 +4935,7 @@
       </p:sp>
       <p:sp>
         <p:nvSpPr>
-          <p:cNvPr id="9" name="TextBox 8"/>
+          <p:cNvPr id="8" name="TextBox 7"/>
           <p:cNvSpPr txBox="1"/>
           <p:nvPr/>
         </p:nvSpPr>
@@ -5013,7 +4974,7 @@
       </p:sp>
       <p:cxnSp>
         <p:nvCxnSpPr>
-          <p:cNvPr id="10" name="Connector 9"/>
+          <p:cNvPr id="9" name="Connector 8"/>
           <p:cNvCxnSpPr/>
           <p:nvPr/>
         </p:nvCxnSpPr>
@@ -5048,7 +5009,7 @@
       </p:cxnSp>
       <p:sp>
         <p:nvSpPr>
-          <p:cNvPr id="11" name="Isosceles Triangle 10"/>
+          <p:cNvPr id="10" name="Isosceles Triangle 9"/>
           <p:cNvSpPr/>
           <p:nvPr/>
         </p:nvSpPr>
@@ -5092,7 +5053,7 @@
       </p:sp>
       <p:sp>
         <p:nvSpPr>
-          <p:cNvPr id="12" name="Rounded Rectangle 11"/>
+          <p:cNvPr id="11" name="Rounded Rectangle 10"/>
           <p:cNvSpPr/>
           <p:nvPr/>
         </p:nvSpPr>
@@ -5140,7 +5101,7 @@
       </p:sp>
       <p:sp>
         <p:nvSpPr>
-          <p:cNvPr id="13" name="Rectangle 12"/>
+          <p:cNvPr id="12" name="Rectangle 11"/>
           <p:cNvSpPr/>
           <p:nvPr/>
         </p:nvSpPr>
@@ -5184,7 +5145,7 @@
       </p:sp>
       <p:sp>
         <p:nvSpPr>
-          <p:cNvPr id="14" name="TextBox 13"/>
+          <p:cNvPr id="13" name="TextBox 12"/>
           <p:cNvSpPr txBox="1"/>
           <p:nvPr/>
         </p:nvSpPr>
@@ -5223,7 +5184,7 @@
       </p:sp>
       <p:sp>
         <p:nvSpPr>
-          <p:cNvPr id="15" name="TextBox 14"/>
+          <p:cNvPr id="14" name="TextBox 13"/>
           <p:cNvSpPr txBox="1"/>
           <p:nvPr/>
         </p:nvSpPr>
@@ -5262,7 +5223,7 @@
       </p:sp>
       <p:cxnSp>
         <p:nvCxnSpPr>
-          <p:cNvPr id="16" name="Connector 15"/>
+          <p:cNvPr id="15" name="Connector 14"/>
           <p:cNvCxnSpPr/>
           <p:nvPr/>
         </p:nvCxnSpPr>
@@ -5297,7 +5258,7 @@
       </p:cxnSp>
       <p:sp>
         <p:nvSpPr>
-          <p:cNvPr id="17" name="Isosceles Triangle 16"/>
+          <p:cNvPr id="16" name="Isosceles Triangle 15"/>
           <p:cNvSpPr/>
           <p:nvPr/>
         </p:nvSpPr>
@@ -5341,7 +5302,7 @@
       </p:sp>
       <p:sp>
         <p:nvSpPr>
-          <p:cNvPr id="18" name="Rounded Rectangle 17"/>
+          <p:cNvPr id="17" name="Rounded Rectangle 16"/>
           <p:cNvSpPr/>
           <p:nvPr/>
         </p:nvSpPr>
@@ -5389,7 +5350,7 @@
       </p:sp>
       <p:sp>
         <p:nvSpPr>
-          <p:cNvPr id="19" name="Rectangle 18"/>
+          <p:cNvPr id="18" name="Rectangle 17"/>
           <p:cNvSpPr/>
           <p:nvPr/>
         </p:nvSpPr>
@@ -5433,7 +5394,7 @@
       </p:sp>
       <p:sp>
         <p:nvSpPr>
-          <p:cNvPr id="20" name="TextBox 19"/>
+          <p:cNvPr id="19" name="TextBox 18"/>
           <p:cNvSpPr txBox="1"/>
           <p:nvPr/>
         </p:nvSpPr>
@@ -5472,7 +5433,7 @@
       </p:sp>
       <p:sp>
         <p:nvSpPr>
-          <p:cNvPr id="21" name="TextBox 20"/>
+          <p:cNvPr id="20" name="TextBox 19"/>
           <p:cNvSpPr txBox="1"/>
           <p:nvPr/>
         </p:nvSpPr>
@@ -5504,14 +5465,14 @@
                 </a:solidFill>
                 <a:latin typeface="PingFang SC"/>
               </a:rPr>
-              <a:t>原始数据(不进窗)|lost-in-the-middle 实证</a:t>
-            </a:r>
-          </a:p>
-        </p:txBody>
-      </p:sp>
-      <p:sp>
-        <p:nvSpPr>
-          <p:cNvPr id="22" name="TextBox 21"/>
+              <a:t>原始数据(不进窗)</a:t>
+            </a:r>
+          </a:p>
+        </p:txBody>
+      </p:sp>
+      <p:sp>
+        <p:nvSpPr>
+          <p:cNvPr id="21" name="TextBox 20"/>
           <p:cNvSpPr txBox="1"/>
           <p:nvPr/>
         </p:nvSpPr>
@@ -5550,7 +5511,7 @@
       </p:sp>
       <p:sp>
         <p:nvSpPr>
-          <p:cNvPr id="23" name="TextBox 22"/>
+          <p:cNvPr id="22" name="TextBox 21"/>
           <p:cNvSpPr txBox="1"/>
           <p:nvPr/>
         </p:nvSpPr>
@@ -11704,7 +11665,7 @@
       </p:sp>
       <p:pic>
         <p:nvPicPr>
-          <p:cNvPr id="5" name="Picture 4" descr="chart_576457.png"/>
+          <p:cNvPr id="5" name="Picture 4" descr="chart_666083.png"/>
           <p:cNvPicPr>
             <a:picLocks noChangeAspect="1"/>
           </p:cNvPicPr>
@@ -11806,7 +11767,7 @@
                 </a:solidFill>
                 <a:latin typeface="PingFang SC"/>
               </a:rPr>
-              <a:t>💡 余量 34k 抗突发与超估</a:t>
+              <a:t>💡 余量 34k 占 35%:抗突发与超估</a:t>
             </a:r>
           </a:p>
         </p:txBody>
@@ -23252,7 +23213,7 @@
       </p:sp>
       <p:pic>
         <p:nvPicPr>
-          <p:cNvPr id="5" name="Picture 4" descr="chart_689347.png"/>
+          <p:cNvPr id="5" name="Picture 4" descr="chart_850316.png"/>
           <p:cNvPicPr>
             <a:picLocks noChangeAspect="1"/>
           </p:cNvPicPr>
@@ -23851,46 +23812,7 @@
       </p:sp>
       <p:sp>
         <p:nvSpPr>
-          <p:cNvPr id="5" name="TextBox 4"/>
-          <p:cNvSpPr txBox="1"/>
-          <p:nvPr/>
-        </p:nvSpPr>
-        <p:spPr>
-          <a:xfrm>
-            <a:off x="9334500" y="0"/>
-            <a:ext cx="2667000" cy="704850"/>
-          </a:xfrm>
-          <a:prstGeom prst="rect">
-            <a:avLst/>
-          </a:prstGeom>
-          <a:noFill/>
-        </p:spPr>
-        <p:txBody>
-          <a:bodyPr wrap="square" anchor="ctr">
-            <a:spAutoFit/>
-          </a:bodyPr>
-          <a:lstStyle/>
-          <a:p>
-            <a:pPr algn="r">
-              <a:lnSpc>
-                <a:spcPct val="100000"/>
-              </a:lnSpc>
-            </a:pPr>
-            <a:r>
-              <a:rPr sz="1100" b="0">
-                <a:solidFill>
-                  <a:srgbClr val="94A3B8"/>
-                </a:solidFill>
-                <a:latin typeface="PingFang SC"/>
-              </a:rPr>
-              <a:t>59.5%^混合命中率^四负载等权;+32.3%^语义层提升^绝对值;64^L1 容量^即可 100% L1 命中(30键池)|调优顺序:键归一&gt;容量&gt;TTL</a:t>
-            </a:r>
-          </a:p>
-        </p:txBody>
-      </p:sp>
-      <p:sp>
-        <p:nvSpPr>
-          <p:cNvPr id="6" name="Rounded Rectangle 5"/>
+          <p:cNvPr id="5" name="Rounded Rectangle 4"/>
           <p:cNvSpPr/>
           <p:nvPr/>
         </p:nvSpPr>
@@ -23938,7 +23860,7 @@
       </p:sp>
       <p:sp>
         <p:nvSpPr>
-          <p:cNvPr id="7" name="Rectangle 6"/>
+          <p:cNvPr id="6" name="Rectangle 5"/>
           <p:cNvSpPr/>
           <p:nvPr/>
         </p:nvSpPr>
@@ -23982,7 +23904,7 @@
       </p:sp>
       <p:sp>
         <p:nvSpPr>
-          <p:cNvPr id="8" name="TextBox 7"/>
+          <p:cNvPr id="7" name="TextBox 6"/>
           <p:cNvSpPr txBox="1"/>
           <p:nvPr/>
         </p:nvSpPr>
@@ -24021,7 +23943,7 @@
       </p:sp>
       <p:sp>
         <p:nvSpPr>
-          <p:cNvPr id="9" name="TextBox 8"/>
+          <p:cNvPr id="8" name="TextBox 7"/>
           <p:cNvSpPr txBox="1"/>
           <p:nvPr/>
         </p:nvSpPr>
@@ -24060,7 +23982,7 @@
       </p:sp>
       <p:sp>
         <p:nvSpPr>
-          <p:cNvPr id="10" name="TextBox 9"/>
+          <p:cNvPr id="9" name="TextBox 8"/>
           <p:cNvSpPr txBox="1"/>
           <p:nvPr/>
         </p:nvSpPr>
@@ -24099,7 +24021,7 @@
       </p:sp>
       <p:sp>
         <p:nvSpPr>
-          <p:cNvPr id="11" name="Rounded Rectangle 10"/>
+          <p:cNvPr id="10" name="Rounded Rectangle 9"/>
           <p:cNvSpPr/>
           <p:nvPr/>
         </p:nvSpPr>
@@ -24147,7 +24069,7 @@
       </p:sp>
       <p:sp>
         <p:nvSpPr>
-          <p:cNvPr id="12" name="Rectangle 11"/>
+          <p:cNvPr id="11" name="Rectangle 10"/>
           <p:cNvSpPr/>
           <p:nvPr/>
         </p:nvSpPr>
@@ -24191,7 +24113,7 @@
       </p:sp>
       <p:sp>
         <p:nvSpPr>
-          <p:cNvPr id="13" name="TextBox 12"/>
+          <p:cNvPr id="12" name="TextBox 11"/>
           <p:cNvSpPr txBox="1"/>
           <p:nvPr/>
         </p:nvSpPr>
@@ -24230,7 +24152,7 @@
       </p:sp>
       <p:sp>
         <p:nvSpPr>
-          <p:cNvPr id="14" name="TextBox 13"/>
+          <p:cNvPr id="13" name="TextBox 12"/>
           <p:cNvSpPr txBox="1"/>
           <p:nvPr/>
         </p:nvSpPr>
@@ -24269,7 +24191,7 @@
       </p:sp>
       <p:sp>
         <p:nvSpPr>
-          <p:cNvPr id="15" name="TextBox 14"/>
+          <p:cNvPr id="14" name="TextBox 13"/>
           <p:cNvSpPr txBox="1"/>
           <p:nvPr/>
         </p:nvSpPr>
@@ -24308,7 +24230,7 @@
       </p:sp>
       <p:sp>
         <p:nvSpPr>
-          <p:cNvPr id="16" name="Rounded Rectangle 15"/>
+          <p:cNvPr id="15" name="Rounded Rectangle 14"/>
           <p:cNvSpPr/>
           <p:nvPr/>
         </p:nvSpPr>
@@ -24356,7 +24278,7 @@
       </p:sp>
       <p:sp>
         <p:nvSpPr>
-          <p:cNvPr id="17" name="Rectangle 16"/>
+          <p:cNvPr id="16" name="Rectangle 15"/>
           <p:cNvSpPr/>
           <p:nvPr/>
         </p:nvSpPr>
@@ -24400,7 +24322,7 @@
       </p:sp>
       <p:sp>
         <p:nvSpPr>
-          <p:cNvPr id="18" name="TextBox 17"/>
+          <p:cNvPr id="17" name="TextBox 16"/>
           <p:cNvSpPr txBox="1"/>
           <p:nvPr/>
         </p:nvSpPr>
@@ -24439,7 +24361,7 @@
       </p:sp>
       <p:sp>
         <p:nvSpPr>
-          <p:cNvPr id="19" name="TextBox 18"/>
+          <p:cNvPr id="18" name="TextBox 17"/>
           <p:cNvSpPr txBox="1"/>
           <p:nvPr/>
         </p:nvSpPr>
@@ -24478,7 +24400,7 @@
       </p:sp>
       <p:sp>
         <p:nvSpPr>
-          <p:cNvPr id="20" name="TextBox 19"/>
+          <p:cNvPr id="19" name="TextBox 18"/>
           <p:cNvSpPr txBox="1"/>
           <p:nvPr/>
         </p:nvSpPr>
@@ -24510,14 +24432,14 @@
                 </a:solidFill>
                 <a:latin typeface="PingFang SC"/>
               </a:rPr>
-              <a:t>即可 100% L1 命中(30键池)|调优顺序:键归一&gt;容量&gt;TTL</a:t>
-            </a:r>
-          </a:p>
-        </p:txBody>
-      </p:sp>
-      <p:sp>
-        <p:nvSpPr>
-          <p:cNvPr id="21" name="TextBox 20"/>
+              <a:t>即可 100% L1 命中(30键池)</a:t>
+            </a:r>
+          </a:p>
+        </p:txBody>
+      </p:sp>
+      <p:sp>
+        <p:nvSpPr>
+          <p:cNvPr id="20" name="TextBox 19"/>
           <p:cNvSpPr txBox="1"/>
           <p:nvPr/>
         </p:nvSpPr>
@@ -24556,7 +24478,7 @@
       </p:sp>
       <p:sp>
         <p:nvSpPr>
-          <p:cNvPr id="22" name="TextBox 21"/>
+          <p:cNvPr id="21" name="TextBox 20"/>
           <p:cNvSpPr txBox="1"/>
           <p:nvPr/>
         </p:nvSpPr>
@@ -28337,46 +28259,7 @@
       </p:sp>
       <p:sp>
         <p:nvSpPr>
-          <p:cNvPr id="5" name="TextBox 4"/>
-          <p:cNvSpPr txBox="1"/>
-          <p:nvPr/>
-        </p:nvSpPr>
-        <p:spPr>
-          <a:xfrm>
-            <a:off x="9334500" y="0"/>
-            <a:ext cx="2667000" cy="704850"/>
-          </a:xfrm>
-          <a:prstGeom prst="rect">
-            <a:avLst/>
-          </a:prstGeom>
-          <a:noFill/>
-        </p:spPr>
-        <p:txBody>
-          <a:bodyPr wrap="square" anchor="ctr">
-            <a:spAutoFit/>
-          </a:bodyPr>
-          <a:lstStyle/>
-          <a:p>
-            <a:pPr algn="r">
-              <a:lnSpc>
-                <a:spcPct val="100000"/>
-              </a:lnSpc>
-            </a:pPr>
-            <a:r>
-              <a:rPr sz="1100" b="0">
-                <a:solidFill>
-                  <a:srgbClr val="94A3B8"/>
-                </a:solidFill>
-                <a:latin typeface="PingFang SC"/>
-              </a:rPr>
-              <a:t>128k^窗口^物理上限;96k^预算^实际可用;70%^降幅^压缩实测(20→6条)|长度/成本/注意力同时做预算</a:t>
-            </a:r>
-          </a:p>
-        </p:txBody>
-      </p:sp>
-      <p:sp>
-        <p:nvSpPr>
-          <p:cNvPr id="6" name="Rounded Rectangle 5"/>
+          <p:cNvPr id="5" name="Rounded Rectangle 4"/>
           <p:cNvSpPr/>
           <p:nvPr/>
         </p:nvSpPr>
@@ -28424,7 +28307,7 @@
       </p:sp>
       <p:sp>
         <p:nvSpPr>
-          <p:cNvPr id="7" name="Rectangle 6"/>
+          <p:cNvPr id="6" name="Rectangle 5"/>
           <p:cNvSpPr/>
           <p:nvPr/>
         </p:nvSpPr>
@@ -28468,7 +28351,7 @@
       </p:sp>
       <p:sp>
         <p:nvSpPr>
-          <p:cNvPr id="8" name="TextBox 7"/>
+          <p:cNvPr id="7" name="TextBox 6"/>
           <p:cNvSpPr txBox="1"/>
           <p:nvPr/>
         </p:nvSpPr>
@@ -28507,7 +28390,7 @@
       </p:sp>
       <p:sp>
         <p:nvSpPr>
-          <p:cNvPr id="9" name="TextBox 8"/>
+          <p:cNvPr id="8" name="TextBox 7"/>
           <p:cNvSpPr txBox="1"/>
           <p:nvPr/>
         </p:nvSpPr>
@@ -28546,7 +28429,7 @@
       </p:sp>
       <p:sp>
         <p:nvSpPr>
-          <p:cNvPr id="10" name="TextBox 9"/>
+          <p:cNvPr id="9" name="TextBox 8"/>
           <p:cNvSpPr txBox="1"/>
           <p:nvPr/>
         </p:nvSpPr>
@@ -28585,7 +28468,7 @@
       </p:sp>
       <p:sp>
         <p:nvSpPr>
-          <p:cNvPr id="11" name="Rounded Rectangle 10"/>
+          <p:cNvPr id="10" name="Rounded Rectangle 9"/>
           <p:cNvSpPr/>
           <p:nvPr/>
         </p:nvSpPr>
@@ -28633,7 +28516,7 @@
       </p:sp>
       <p:sp>
         <p:nvSpPr>
-          <p:cNvPr id="12" name="Rectangle 11"/>
+          <p:cNvPr id="11" name="Rectangle 10"/>
           <p:cNvSpPr/>
           <p:nvPr/>
         </p:nvSpPr>
@@ -28677,7 +28560,7 @@
       </p:sp>
       <p:sp>
         <p:nvSpPr>
-          <p:cNvPr id="13" name="TextBox 12"/>
+          <p:cNvPr id="12" name="TextBox 11"/>
           <p:cNvSpPr txBox="1"/>
           <p:nvPr/>
         </p:nvSpPr>
@@ -28716,7 +28599,7 @@
       </p:sp>
       <p:sp>
         <p:nvSpPr>
-          <p:cNvPr id="14" name="TextBox 13"/>
+          <p:cNvPr id="13" name="TextBox 12"/>
           <p:cNvSpPr txBox="1"/>
           <p:nvPr/>
         </p:nvSpPr>
@@ -28755,7 +28638,7 @@
       </p:sp>
       <p:sp>
         <p:nvSpPr>
-          <p:cNvPr id="15" name="TextBox 14"/>
+          <p:cNvPr id="14" name="TextBox 13"/>
           <p:cNvSpPr txBox="1"/>
           <p:nvPr/>
         </p:nvSpPr>
@@ -28794,7 +28677,7 @@
       </p:sp>
       <p:sp>
         <p:nvSpPr>
-          <p:cNvPr id="16" name="Rounded Rectangle 15"/>
+          <p:cNvPr id="15" name="Rounded Rectangle 14"/>
           <p:cNvSpPr/>
           <p:nvPr/>
         </p:nvSpPr>
@@ -28842,7 +28725,7 @@
       </p:sp>
       <p:sp>
         <p:nvSpPr>
-          <p:cNvPr id="17" name="Rectangle 16"/>
+          <p:cNvPr id="16" name="Rectangle 15"/>
           <p:cNvSpPr/>
           <p:nvPr/>
         </p:nvSpPr>
@@ -28886,7 +28769,7 @@
       </p:sp>
       <p:sp>
         <p:nvSpPr>
-          <p:cNvPr id="18" name="TextBox 17"/>
+          <p:cNvPr id="17" name="TextBox 16"/>
           <p:cNvSpPr txBox="1"/>
           <p:nvPr/>
         </p:nvSpPr>
@@ -28925,7 +28808,7 @@
       </p:sp>
       <p:sp>
         <p:nvSpPr>
-          <p:cNvPr id="19" name="TextBox 18"/>
+          <p:cNvPr id="18" name="TextBox 17"/>
           <p:cNvSpPr txBox="1"/>
           <p:nvPr/>
         </p:nvSpPr>
@@ -28964,7 +28847,7 @@
       </p:sp>
       <p:sp>
         <p:nvSpPr>
-          <p:cNvPr id="20" name="TextBox 19"/>
+          <p:cNvPr id="19" name="TextBox 18"/>
           <p:cNvSpPr txBox="1"/>
           <p:nvPr/>
         </p:nvSpPr>
@@ -28996,14 +28879,14 @@
                 </a:solidFill>
                 <a:latin typeface="PingFang SC"/>
               </a:rPr>
-              <a:t>压缩实测(20→6条)|长度/成本/注意力同时做预算</a:t>
-            </a:r>
-          </a:p>
-        </p:txBody>
-      </p:sp>
-      <p:sp>
-        <p:nvSpPr>
-          <p:cNvPr id="21" name="TextBox 20"/>
+              <a:t>压缩实测(20→6条)</a:t>
+            </a:r>
+          </a:p>
+        </p:txBody>
+      </p:sp>
+      <p:sp>
+        <p:nvSpPr>
+          <p:cNvPr id="20" name="TextBox 19"/>
           <p:cNvSpPr txBox="1"/>
           <p:nvPr/>
         </p:nvSpPr>
@@ -29042,7 +28925,7 @@
       </p:sp>
       <p:sp>
         <p:nvSpPr>
-          <p:cNvPr id="22" name="TextBox 21"/>
+          <p:cNvPr id="21" name="TextBox 20"/>
           <p:cNvSpPr txBox="1"/>
           <p:nvPr/>
         </p:nvSpPr>
@@ -30221,46 +30104,7 @@
       </p:sp>
       <p:sp>
         <p:nvSpPr>
-          <p:cNvPr id="5" name="TextBox 4"/>
-          <p:cNvSpPr txBox="1"/>
-          <p:nvPr/>
-        </p:nvSpPr>
-        <p:spPr>
-          <a:xfrm>
-            <a:off x="9334500" y="0"/>
-            <a:ext cx="2667000" cy="704850"/>
-          </a:xfrm>
-          <a:prstGeom prst="rect">
-            <a:avLst/>
-          </a:prstGeom>
-          <a:noFill/>
-        </p:spPr>
-        <p:txBody>
-          <a:bodyPr wrap="square" anchor="ctr">
-            <a:spAutoFit/>
-          </a:bodyPr>
-          <a:lstStyle/>
-          <a:p>
-            <a:pPr algn="r">
-              <a:lnSpc>
-                <a:spcPct val="100000"/>
-              </a:lnSpc>
-            </a:pPr>
-            <a:r>
-              <a:rPr sz="1100" b="0">
-                <a:solidFill>
-                  <a:srgbClr val="94A3B8"/>
-                </a:solidFill>
-                <a:latin typeface="PingFang SC"/>
-              </a:rPr>
-              <a:t>FitReport 记录压缩比</a:t>
-            </a:r>
-          </a:p>
-        </p:txBody>
-      </p:sp>
-      <p:sp>
-        <p:nvSpPr>
-          <p:cNvPr id="6" name="Rounded Rectangle 5"/>
+          <p:cNvPr id="5" name="Rounded Rectangle 4"/>
           <p:cNvSpPr/>
           <p:nvPr/>
         </p:nvSpPr>
@@ -30306,6 +30150,45 @@
       </p:sp>
       <p:sp>
         <p:nvSpPr>
+          <p:cNvPr id="6" name="TextBox 5"/>
+          <p:cNvSpPr txBox="1"/>
+          <p:nvPr/>
+        </p:nvSpPr>
+        <p:spPr>
+          <a:xfrm>
+            <a:off x="1962150" y="685800"/>
+            <a:ext cx="1905000" cy="209550"/>
+          </a:xfrm>
+          <a:prstGeom prst="rect">
+            <a:avLst/>
+          </a:prstGeom>
+          <a:noFill/>
+        </p:spPr>
+        <p:txBody>
+          <a:bodyPr wrap="square" anchor="ctr">
+            <a:spAutoFit/>
+          </a:bodyPr>
+          <a:lstStyle/>
+          <a:p>
+            <a:pPr algn="l">
+              <a:lnSpc>
+                <a:spcPct val="100000"/>
+              </a:lnSpc>
+            </a:pPr>
+            <a:r>
+              <a:rPr sz="1100" b="1">
+                <a:solidFill>
+                  <a:srgbClr val="2563EB"/>
+                </a:solidFill>
+                <a:latin typeface="PingFang SC"/>
+              </a:rPr>
+              <a:t>L1</a:t>
+            </a:r>
+          </a:p>
+        </p:txBody>
+      </p:sp>
+      <p:sp>
+        <p:nvSpPr>
           <p:cNvPr id="7" name="Rounded Rectangle 6"/>
           <p:cNvSpPr/>
           <p:nvPr/>
@@ -30404,29 +30287,29 @@
         </p:nvSpPr>
         <p:spPr>
           <a:xfrm>
-            <a:off x="2038350" y="952500"/>
-            <a:ext cx="8534400" cy="819150"/>
-          </a:xfrm>
-          <a:prstGeom prst="rect">
-            <a:avLst/>
-          </a:prstGeom>
-          <a:noFill/>
-        </p:spPr>
-        <p:txBody>
-          <a:bodyPr wrap="square" anchor="ctr">
+            <a:off x="2057400" y="952500"/>
+            <a:ext cx="8496300" cy="819150"/>
+          </a:xfrm>
+          <a:prstGeom prst="rect">
+            <a:avLst/>
+          </a:prstGeom>
+          <a:noFill/>
+        </p:spPr>
+        <p:txBody>
+          <a:bodyPr wrap="none" anchor="ctr">
             <a:spAutoFit/>
           </a:bodyPr>
           <a:lstStyle/>
           <a:p>
             <a:pPr algn="l">
               <a:lnSpc>
-                <a:spcPct val="100000"/>
-              </a:lnSpc>
-            </a:pPr>
-            <a:r>
-              <a:rPr sz="1200" b="1">
-                <a:solidFill>
-                  <a:srgbClr val="475569"/>
+                <a:spcPct val="115000"/>
+              </a:lnSpc>
+            </a:pPr>
+            <a:r>
+              <a:rPr sz="1100" b="1">
+                <a:solidFill>
+                  <a:srgbClr val="0B1D3A"/>
                 </a:solidFill>
                 <a:latin typeface="PingFang SC"/>
               </a:rPr>
@@ -30449,9 +30332,9 @@
           <a:prstGeom prst="line">
             <a:avLst/>
           </a:prstGeom>
-          <a:ln w="15240">
+          <a:ln w="17780">
             <a:solidFill>
-              <a:srgbClr val="94A3B8"/>
+              <a:srgbClr val="475569"/>
             </a:solidFill>
           </a:ln>
         </p:spPr>
@@ -30485,7 +30368,7 @@
             <a:avLst/>
           </a:prstGeom>
           <a:solidFill>
-            <a:srgbClr val="94A3B8"/>
+            <a:srgbClr val="475569"/>
           </a:solidFill>
           <a:ln>
             <a:noFill/>
@@ -30516,53 +30399,14 @@
       </p:sp>
       <p:sp>
         <p:nvSpPr>
-          <p:cNvPr id="12" name="TextBox 11"/>
-          <p:cNvSpPr txBox="1"/>
-          <p:nvPr/>
-        </p:nvSpPr>
-        <p:spPr>
-          <a:xfrm>
-            <a:off x="6248400" y="1771650"/>
-            <a:ext cx="2095500" cy="247650"/>
-          </a:xfrm>
-          <a:prstGeom prst="rect">
-            <a:avLst/>
-          </a:prstGeom>
-          <a:noFill/>
-        </p:spPr>
-        <p:txBody>
-          <a:bodyPr wrap="square" anchor="ctr">
-            <a:spAutoFit/>
-          </a:bodyPr>
-          <a:lstStyle/>
-          <a:p>
-            <a:pPr algn="l">
-              <a:lnSpc>
-                <a:spcPct val="100000"/>
-              </a:lnSpc>
-            </a:pPr>
-            <a:r>
-              <a:rPr sz="1000" b="0">
-                <a:solidFill>
-                  <a:srgbClr val="94A3B8"/>
-                </a:solidFill>
-                <a:latin typeface="PingFang SC"/>
-              </a:rPr>
-              <a:t>优先级</a:t>
-            </a:r>
-          </a:p>
-        </p:txBody>
-      </p:sp>
-      <p:sp>
-        <p:nvSpPr>
-          <p:cNvPr id="13" name="Rounded Rectangle 12"/>
-          <p:cNvSpPr/>
-          <p:nvPr/>
-        </p:nvSpPr>
-        <p:spPr>
-          <a:xfrm>
-            <a:off x="1847850" y="1981200"/>
-            <a:ext cx="8877300" cy="895350"/>
+          <p:cNvPr id="12" name="Rounded Rectangle 11"/>
+          <p:cNvSpPr/>
+          <p:nvPr/>
+        </p:nvSpPr>
+        <p:spPr>
+          <a:xfrm>
+            <a:off x="5648325" y="1809750"/>
+            <a:ext cx="895350" cy="171450"/>
           </a:xfrm>
           <a:prstGeom prst="roundRect">
             <a:avLst>
@@ -30570,32 +30414,73 @@
             </a:avLst>
           </a:prstGeom>
           <a:solidFill>
-            <a:srgbClr val="F1F5F9"/>
-          </a:solidFill>
-          <a:ln>
-            <a:noFill/>
-          </a:ln>
-          <a:effectLst/>
-        </p:spPr>
-        <p:style>
-          <a:lnRef idx="1">
-            <a:schemeClr val="accent1"/>
-          </a:lnRef>
-          <a:fillRef idx="3">
-            <a:schemeClr val="accent1"/>
-          </a:fillRef>
-          <a:effectRef idx="2">
-            <a:schemeClr val="accent1"/>
-          </a:effectRef>
-          <a:fontRef idx="minor">
-            <a:schemeClr val="lt1"/>
-          </a:fontRef>
-        </p:style>
-        <p:txBody>
-          <a:bodyPr rtlCol="0" anchor="ctr"/>
-          <a:lstStyle/>
-          <a:p>
-            <a:pPr algn="ctr"/>
+            <a:srgbClr val="FFFFFF"/>
+          </a:solidFill>
+          <a:ln w="12700">
+            <a:solidFill>
+              <a:srgbClr val="DDE5EE"/>
+            </a:solidFill>
+          </a:ln>
+          <a:effectLst/>
+        </p:spPr>
+        <p:style>
+          <a:lnRef idx="1">
+            <a:schemeClr val="accent1"/>
+          </a:lnRef>
+          <a:fillRef idx="3">
+            <a:schemeClr val="accent1"/>
+          </a:fillRef>
+          <a:effectRef idx="2">
+            <a:schemeClr val="accent1"/>
+          </a:effectRef>
+          <a:fontRef idx="minor">
+            <a:schemeClr val="lt1"/>
+          </a:fontRef>
+        </p:style>
+        <p:txBody>
+          <a:bodyPr rtlCol="0" anchor="ctr"/>
+          <a:lstStyle/>
+          <a:p>
+            <a:pPr algn="ctr"/>
+          </a:p>
+        </p:txBody>
+      </p:sp>
+      <p:sp>
+        <p:nvSpPr>
+          <p:cNvPr id="13" name="TextBox 12"/>
+          <p:cNvSpPr txBox="1"/>
+          <p:nvPr/>
+        </p:nvSpPr>
+        <p:spPr>
+          <a:xfrm>
+            <a:off x="5648325" y="1809750"/>
+            <a:ext cx="895350" cy="171450"/>
+          </a:xfrm>
+          <a:prstGeom prst="rect">
+            <a:avLst/>
+          </a:prstGeom>
+          <a:noFill/>
+        </p:spPr>
+        <p:txBody>
+          <a:bodyPr wrap="square" anchor="ctr">
+            <a:spAutoFit/>
+          </a:bodyPr>
+          <a:lstStyle/>
+          <a:p>
+            <a:pPr algn="ctr">
+              <a:lnSpc>
+                <a:spcPct val="100000"/>
+              </a:lnSpc>
+            </a:pPr>
+            <a:r>
+              <a:rPr sz="1100" b="1">
+                <a:solidFill>
+                  <a:srgbClr val="0B1D3A"/>
+                </a:solidFill>
+                <a:latin typeface="PingFang SC"/>
+              </a:rPr>
+              <a:t>优先级</a:t>
+            </a:r>
           </a:p>
         </p:txBody>
       </p:sp>
@@ -30607,8 +30492,8 @@
         </p:nvSpPr>
         <p:spPr>
           <a:xfrm>
-            <a:off x="1905000" y="2019300"/>
-            <a:ext cx="8763000" cy="819150"/>
+            <a:off x="1847850" y="1981200"/>
+            <a:ext cx="8877300" cy="895350"/>
           </a:xfrm>
           <a:prstGeom prst="roundRect">
             <a:avLst>
@@ -30616,6 +30501,91 @@
             </a:avLst>
           </a:prstGeom>
           <a:solidFill>
+            <a:srgbClr val="F1F5F9"/>
+          </a:solidFill>
+          <a:ln>
+            <a:noFill/>
+          </a:ln>
+          <a:effectLst/>
+        </p:spPr>
+        <p:style>
+          <a:lnRef idx="1">
+            <a:schemeClr val="accent1"/>
+          </a:lnRef>
+          <a:fillRef idx="3">
+            <a:schemeClr val="accent1"/>
+          </a:fillRef>
+          <a:effectRef idx="2">
+            <a:schemeClr val="accent1"/>
+          </a:effectRef>
+          <a:fontRef idx="minor">
+            <a:schemeClr val="lt1"/>
+          </a:fontRef>
+        </p:style>
+        <p:txBody>
+          <a:bodyPr rtlCol="0" anchor="ctr"/>
+          <a:lstStyle/>
+          <a:p>
+            <a:pPr algn="ctr"/>
+          </a:p>
+        </p:txBody>
+      </p:sp>
+      <p:sp>
+        <p:nvSpPr>
+          <p:cNvPr id="15" name="TextBox 14"/>
+          <p:cNvSpPr txBox="1"/>
+          <p:nvPr/>
+        </p:nvSpPr>
+        <p:spPr>
+          <a:xfrm>
+            <a:off x="1962150" y="1752600"/>
+            <a:ext cx="1905000" cy="209550"/>
+          </a:xfrm>
+          <a:prstGeom prst="rect">
+            <a:avLst/>
+          </a:prstGeom>
+          <a:noFill/>
+        </p:spPr>
+        <p:txBody>
+          <a:bodyPr wrap="square" anchor="ctr">
+            <a:spAutoFit/>
+          </a:bodyPr>
+          <a:lstStyle/>
+          <a:p>
+            <a:pPr algn="l">
+              <a:lnSpc>
+                <a:spcPct val="100000"/>
+              </a:lnSpc>
+            </a:pPr>
+            <a:r>
+              <a:rPr sz="1100" b="1">
+                <a:solidFill>
+                  <a:srgbClr val="14B8A6"/>
+                </a:solidFill>
+                <a:latin typeface="PingFang SC"/>
+              </a:rPr>
+              <a:t>L2</a:t>
+            </a:r>
+          </a:p>
+        </p:txBody>
+      </p:sp>
+      <p:sp>
+        <p:nvSpPr>
+          <p:cNvPr id="16" name="Rounded Rectangle 15"/>
+          <p:cNvSpPr/>
+          <p:nvPr/>
+        </p:nvSpPr>
+        <p:spPr>
+          <a:xfrm>
+            <a:off x="1905000" y="2019300"/>
+            <a:ext cx="8763000" cy="819150"/>
+          </a:xfrm>
+          <a:prstGeom prst="roundRect">
+            <a:avLst>
+              <a:gd name="adj" fmla="val 8000"/>
+            </a:avLst>
+          </a:prstGeom>
+          <a:solidFill>
             <a:srgbClr val="FFFFFF"/>
           </a:solidFill>
           <a:ln w="12700">
@@ -30649,7 +30619,7 @@
       </p:sp>
       <p:sp>
         <p:nvSpPr>
-          <p:cNvPr id="15" name="Rectangle 14"/>
+          <p:cNvPr id="17" name="Rectangle 16"/>
           <p:cNvSpPr/>
           <p:nvPr/>
         </p:nvSpPr>
@@ -30693,35 +30663,35 @@
       </p:sp>
       <p:sp>
         <p:nvSpPr>
-          <p:cNvPr id="16" name="TextBox 15"/>
-          <p:cNvSpPr txBox="1"/>
-          <p:nvPr/>
-        </p:nvSpPr>
-        <p:spPr>
-          <a:xfrm>
-            <a:off x="2038350" y="2019300"/>
-            <a:ext cx="8534400" cy="819150"/>
-          </a:xfrm>
-          <a:prstGeom prst="rect">
-            <a:avLst/>
-          </a:prstGeom>
-          <a:noFill/>
-        </p:spPr>
-        <p:txBody>
-          <a:bodyPr wrap="square" anchor="ctr">
+          <p:cNvPr id="18" name="TextBox 17"/>
+          <p:cNvSpPr txBox="1"/>
+          <p:nvPr/>
+        </p:nvSpPr>
+        <p:spPr>
+          <a:xfrm>
+            <a:off x="2057400" y="2019300"/>
+            <a:ext cx="8496300" cy="819150"/>
+          </a:xfrm>
+          <a:prstGeom prst="rect">
+            <a:avLst/>
+          </a:prstGeom>
+          <a:noFill/>
+        </p:spPr>
+        <p:txBody>
+          <a:bodyPr wrap="none" anchor="ctr">
             <a:spAutoFit/>
           </a:bodyPr>
           <a:lstStyle/>
           <a:p>
             <a:pPr algn="l">
               <a:lnSpc>
-                <a:spcPct val="100000"/>
-              </a:lnSpc>
-            </a:pPr>
-            <a:r>
-              <a:rPr sz="1200" b="1">
-                <a:solidFill>
-                  <a:srgbClr val="475569"/>
+                <a:spcPct val="115000"/>
+              </a:lnSpc>
+            </a:pPr>
+            <a:r>
+              <a:rPr sz="1100" b="1">
+                <a:solidFill>
+                  <a:srgbClr val="0B1D3A"/>
                 </a:solidFill>
                 <a:latin typeface="PingFang SC"/>
               </a:rPr>
@@ -30732,7 +30702,7 @@
       </p:sp>
       <p:cxnSp>
         <p:nvCxnSpPr>
-          <p:cNvPr id="17" name="Connector 16"/>
+          <p:cNvPr id="19" name="Connector 18"/>
           <p:cNvCxnSpPr/>
           <p:nvPr/>
         </p:nvCxnSpPr>
@@ -30744,9 +30714,9 @@
           <a:prstGeom prst="line">
             <a:avLst/>
           </a:prstGeom>
-          <a:ln w="15240">
+          <a:ln w="17780">
             <a:solidFill>
-              <a:srgbClr val="94A3B8"/>
+              <a:srgbClr val="475569"/>
             </a:solidFill>
           </a:ln>
         </p:spPr>
@@ -30767,7 +30737,7 @@
       </p:cxnSp>
       <p:sp>
         <p:nvSpPr>
-          <p:cNvPr id="18" name="Isosceles Triangle 17"/>
+          <p:cNvPr id="20" name="Isosceles Triangle 19"/>
           <p:cNvSpPr/>
           <p:nvPr/>
         </p:nvSpPr>
@@ -30780,7 +30750,7 @@
             <a:avLst/>
           </a:prstGeom>
           <a:solidFill>
-            <a:srgbClr val="94A3B8"/>
+            <a:srgbClr val="475569"/>
           </a:solidFill>
           <a:ln>
             <a:noFill/>
@@ -30811,53 +30781,14 @@
       </p:sp>
       <p:sp>
         <p:nvSpPr>
-          <p:cNvPr id="19" name="TextBox 18"/>
-          <p:cNvSpPr txBox="1"/>
-          <p:nvPr/>
-        </p:nvSpPr>
-        <p:spPr>
-          <a:xfrm>
-            <a:off x="6248400" y="2838450"/>
-            <a:ext cx="2095500" cy="247650"/>
-          </a:xfrm>
-          <a:prstGeom prst="rect">
-            <a:avLst/>
-          </a:prstGeom>
-          <a:noFill/>
-        </p:spPr>
-        <p:txBody>
-          <a:bodyPr wrap="square" anchor="ctr">
-            <a:spAutoFit/>
-          </a:bodyPr>
-          <a:lstStyle/>
-          <a:p>
-            <a:pPr algn="l">
-              <a:lnSpc>
-                <a:spcPct val="100000"/>
-              </a:lnSpc>
-            </a:pPr>
-            <a:r>
-              <a:rPr sz="1000" b="0">
-                <a:solidFill>
-                  <a:srgbClr val="94A3B8"/>
-                </a:solidFill>
-                <a:latin typeface="PingFang SC"/>
-              </a:rPr>
-              <a:t>装箱</a:t>
-            </a:r>
-          </a:p>
-        </p:txBody>
-      </p:sp>
-      <p:sp>
-        <p:nvSpPr>
-          <p:cNvPr id="20" name="Rounded Rectangle 19"/>
-          <p:cNvSpPr/>
-          <p:nvPr/>
-        </p:nvSpPr>
-        <p:spPr>
-          <a:xfrm>
-            <a:off x="1847850" y="3048000"/>
-            <a:ext cx="8877300" cy="895350"/>
+          <p:cNvPr id="21" name="Rounded Rectangle 20"/>
+          <p:cNvSpPr/>
+          <p:nvPr/>
+        </p:nvSpPr>
+        <p:spPr>
+          <a:xfrm>
+            <a:off x="5743575" y="2876550"/>
+            <a:ext cx="704850" cy="171450"/>
           </a:xfrm>
           <a:prstGeom prst="roundRect">
             <a:avLst>
@@ -30865,45 +30796,86 @@
             </a:avLst>
           </a:prstGeom>
           <a:solidFill>
-            <a:srgbClr val="F1F5F9"/>
-          </a:solidFill>
-          <a:ln>
-            <a:noFill/>
-          </a:ln>
-          <a:effectLst/>
-        </p:spPr>
-        <p:style>
-          <a:lnRef idx="1">
-            <a:schemeClr val="accent1"/>
-          </a:lnRef>
-          <a:fillRef idx="3">
-            <a:schemeClr val="accent1"/>
-          </a:fillRef>
-          <a:effectRef idx="2">
-            <a:schemeClr val="accent1"/>
-          </a:effectRef>
-          <a:fontRef idx="minor">
-            <a:schemeClr val="lt1"/>
-          </a:fontRef>
-        </p:style>
-        <p:txBody>
-          <a:bodyPr rtlCol="0" anchor="ctr"/>
-          <a:lstStyle/>
-          <a:p>
-            <a:pPr algn="ctr"/>
-          </a:p>
-        </p:txBody>
-      </p:sp>
-      <p:sp>
-        <p:nvSpPr>
-          <p:cNvPr id="21" name="Rounded Rectangle 20"/>
-          <p:cNvSpPr/>
-          <p:nvPr/>
-        </p:nvSpPr>
-        <p:spPr>
-          <a:xfrm>
-            <a:off x="1905000" y="3086100"/>
-            <a:ext cx="8763000" cy="819150"/>
+            <a:srgbClr val="FFFFFF"/>
+          </a:solidFill>
+          <a:ln w="12700">
+            <a:solidFill>
+              <a:srgbClr val="DDE5EE"/>
+            </a:solidFill>
+          </a:ln>
+          <a:effectLst/>
+        </p:spPr>
+        <p:style>
+          <a:lnRef idx="1">
+            <a:schemeClr val="accent1"/>
+          </a:lnRef>
+          <a:fillRef idx="3">
+            <a:schemeClr val="accent1"/>
+          </a:fillRef>
+          <a:effectRef idx="2">
+            <a:schemeClr val="accent1"/>
+          </a:effectRef>
+          <a:fontRef idx="minor">
+            <a:schemeClr val="lt1"/>
+          </a:fontRef>
+        </p:style>
+        <p:txBody>
+          <a:bodyPr rtlCol="0" anchor="ctr"/>
+          <a:lstStyle/>
+          <a:p>
+            <a:pPr algn="ctr"/>
+          </a:p>
+        </p:txBody>
+      </p:sp>
+      <p:sp>
+        <p:nvSpPr>
+          <p:cNvPr id="22" name="TextBox 21"/>
+          <p:cNvSpPr txBox="1"/>
+          <p:nvPr/>
+        </p:nvSpPr>
+        <p:spPr>
+          <a:xfrm>
+            <a:off x="5743575" y="2876550"/>
+            <a:ext cx="704850" cy="171450"/>
+          </a:xfrm>
+          <a:prstGeom prst="rect">
+            <a:avLst/>
+          </a:prstGeom>
+          <a:noFill/>
+        </p:spPr>
+        <p:txBody>
+          <a:bodyPr wrap="square" anchor="ctr">
+            <a:spAutoFit/>
+          </a:bodyPr>
+          <a:lstStyle/>
+          <a:p>
+            <a:pPr algn="ctr">
+              <a:lnSpc>
+                <a:spcPct val="100000"/>
+              </a:lnSpc>
+            </a:pPr>
+            <a:r>
+              <a:rPr sz="1100" b="1">
+                <a:solidFill>
+                  <a:srgbClr val="0B1D3A"/>
+                </a:solidFill>
+                <a:latin typeface="PingFang SC"/>
+              </a:rPr>
+              <a:t>装箱</a:t>
+            </a:r>
+          </a:p>
+        </p:txBody>
+      </p:sp>
+      <p:sp>
+        <p:nvSpPr>
+          <p:cNvPr id="23" name="Rounded Rectangle 22"/>
+          <p:cNvSpPr/>
+          <p:nvPr/>
+        </p:nvSpPr>
+        <p:spPr>
+          <a:xfrm>
+            <a:off x="1847850" y="3048000"/>
+            <a:ext cx="8877300" cy="895350"/>
           </a:xfrm>
           <a:prstGeom prst="roundRect">
             <a:avLst>
@@ -30911,6 +30883,91 @@
             </a:avLst>
           </a:prstGeom>
           <a:solidFill>
+            <a:srgbClr val="F1F5F9"/>
+          </a:solidFill>
+          <a:ln>
+            <a:noFill/>
+          </a:ln>
+          <a:effectLst/>
+        </p:spPr>
+        <p:style>
+          <a:lnRef idx="1">
+            <a:schemeClr val="accent1"/>
+          </a:lnRef>
+          <a:fillRef idx="3">
+            <a:schemeClr val="accent1"/>
+          </a:fillRef>
+          <a:effectRef idx="2">
+            <a:schemeClr val="accent1"/>
+          </a:effectRef>
+          <a:fontRef idx="minor">
+            <a:schemeClr val="lt1"/>
+          </a:fontRef>
+        </p:style>
+        <p:txBody>
+          <a:bodyPr rtlCol="0" anchor="ctr"/>
+          <a:lstStyle/>
+          <a:p>
+            <a:pPr algn="ctr"/>
+          </a:p>
+        </p:txBody>
+      </p:sp>
+      <p:sp>
+        <p:nvSpPr>
+          <p:cNvPr id="24" name="TextBox 23"/>
+          <p:cNvSpPr txBox="1"/>
+          <p:nvPr/>
+        </p:nvSpPr>
+        <p:spPr>
+          <a:xfrm>
+            <a:off x="1962150" y="2819400"/>
+            <a:ext cx="1905000" cy="209550"/>
+          </a:xfrm>
+          <a:prstGeom prst="rect">
+            <a:avLst/>
+          </a:prstGeom>
+          <a:noFill/>
+        </p:spPr>
+        <p:txBody>
+          <a:bodyPr wrap="square" anchor="ctr">
+            <a:spAutoFit/>
+          </a:bodyPr>
+          <a:lstStyle/>
+          <a:p>
+            <a:pPr algn="l">
+              <a:lnSpc>
+                <a:spcPct val="100000"/>
+              </a:lnSpc>
+            </a:pPr>
+            <a:r>
+              <a:rPr sz="1100" b="1">
+                <a:solidFill>
+                  <a:srgbClr val="8B5CF6"/>
+                </a:solidFill>
+                <a:latin typeface="PingFang SC"/>
+              </a:rPr>
+              <a:t>L3</a:t>
+            </a:r>
+          </a:p>
+        </p:txBody>
+      </p:sp>
+      <p:sp>
+        <p:nvSpPr>
+          <p:cNvPr id="25" name="Rounded Rectangle 24"/>
+          <p:cNvSpPr/>
+          <p:nvPr/>
+        </p:nvSpPr>
+        <p:spPr>
+          <a:xfrm>
+            <a:off x="1905000" y="3086100"/>
+            <a:ext cx="8763000" cy="819150"/>
+          </a:xfrm>
+          <a:prstGeom prst="roundRect">
+            <a:avLst>
+              <a:gd name="adj" fmla="val 8000"/>
+            </a:avLst>
+          </a:prstGeom>
+          <a:solidFill>
             <a:srgbClr val="FFFFFF"/>
           </a:solidFill>
           <a:ln w="12700">
@@ -30944,7 +31001,7 @@
       </p:sp>
       <p:sp>
         <p:nvSpPr>
-          <p:cNvPr id="22" name="Rectangle 21"/>
+          <p:cNvPr id="26" name="Rectangle 25"/>
           <p:cNvSpPr/>
           <p:nvPr/>
         </p:nvSpPr>
@@ -30988,35 +31045,35 @@
       </p:sp>
       <p:sp>
         <p:nvSpPr>
-          <p:cNvPr id="23" name="TextBox 22"/>
-          <p:cNvSpPr txBox="1"/>
-          <p:nvPr/>
-        </p:nvSpPr>
-        <p:spPr>
-          <a:xfrm>
-            <a:off x="2038350" y="3086100"/>
-            <a:ext cx="8534400" cy="819150"/>
-          </a:xfrm>
-          <a:prstGeom prst="rect">
-            <a:avLst/>
-          </a:prstGeom>
-          <a:noFill/>
-        </p:spPr>
-        <p:txBody>
-          <a:bodyPr wrap="square" anchor="ctr">
+          <p:cNvPr id="27" name="TextBox 26"/>
+          <p:cNvSpPr txBox="1"/>
+          <p:nvPr/>
+        </p:nvSpPr>
+        <p:spPr>
+          <a:xfrm>
+            <a:off x="2057400" y="3086100"/>
+            <a:ext cx="8496300" cy="819150"/>
+          </a:xfrm>
+          <a:prstGeom prst="rect">
+            <a:avLst/>
+          </a:prstGeom>
+          <a:noFill/>
+        </p:spPr>
+        <p:txBody>
+          <a:bodyPr wrap="none" anchor="ctr">
             <a:spAutoFit/>
           </a:bodyPr>
           <a:lstStyle/>
           <a:p>
             <a:pPr algn="l">
               <a:lnSpc>
-                <a:spcPct val="100000"/>
-              </a:lnSpc>
-            </a:pPr>
-            <a:r>
-              <a:rPr sz="1200" b="1">
-                <a:solidFill>
-                  <a:srgbClr val="475569"/>
+                <a:spcPct val="115000"/>
+              </a:lnSpc>
+            </a:pPr>
+            <a:r>
+              <a:rPr sz="1300" b="1">
+                <a:solidFill>
+                  <a:srgbClr val="0B1D3A"/>
                 </a:solidFill>
                 <a:latin typeface="PingFang SC"/>
               </a:rPr>
@@ -31027,7 +31084,7 @@
       </p:sp>
       <p:cxnSp>
         <p:nvCxnSpPr>
-          <p:cNvPr id="24" name="Connector 23"/>
+          <p:cNvPr id="28" name="Connector 27"/>
           <p:cNvCxnSpPr/>
           <p:nvPr/>
         </p:nvCxnSpPr>
@@ -31039,9 +31096,9 @@
           <a:prstGeom prst="line">
             <a:avLst/>
           </a:prstGeom>
-          <a:ln w="15240">
+          <a:ln w="17780">
             <a:solidFill>
-              <a:srgbClr val="94A3B8"/>
+              <a:srgbClr val="475569"/>
             </a:solidFill>
           </a:ln>
         </p:spPr>
@@ -31062,7 +31119,7 @@
       </p:cxnSp>
       <p:sp>
         <p:nvSpPr>
-          <p:cNvPr id="25" name="Isosceles Triangle 24"/>
+          <p:cNvPr id="29" name="Isosceles Triangle 28"/>
           <p:cNvSpPr/>
           <p:nvPr/>
         </p:nvSpPr>
@@ -31075,7 +31132,7 @@
             <a:avLst/>
           </a:prstGeom>
           <a:solidFill>
-            <a:srgbClr val="94A3B8"/>
+            <a:srgbClr val="475569"/>
           </a:solidFill>
           <a:ln>
             <a:noFill/>
@@ -31106,53 +31163,14 @@
       </p:sp>
       <p:sp>
         <p:nvSpPr>
-          <p:cNvPr id="26" name="TextBox 25"/>
-          <p:cNvSpPr txBox="1"/>
-          <p:nvPr/>
-        </p:nvSpPr>
-        <p:spPr>
-          <a:xfrm>
-            <a:off x="6248400" y="3905250"/>
-            <a:ext cx="2095500" cy="247650"/>
-          </a:xfrm>
-          <a:prstGeom prst="rect">
-            <a:avLst/>
-          </a:prstGeom>
-          <a:noFill/>
-        </p:spPr>
-        <p:txBody>
-          <a:bodyPr wrap="square" anchor="ctr">
-            <a:spAutoFit/>
-          </a:bodyPr>
-          <a:lstStyle/>
-          <a:p>
-            <a:pPr algn="l">
-              <a:lnSpc>
-                <a:spcPct val="100000"/>
-              </a:lnSpc>
-            </a:pPr>
-            <a:r>
-              <a:rPr sz="1000" b="0">
-                <a:solidFill>
-                  <a:srgbClr val="94A3B8"/>
-                </a:solidFill>
-                <a:latin typeface="PingFang SC"/>
-              </a:rPr>
-              <a:t>压缩</a:t>
-            </a:r>
-          </a:p>
-        </p:txBody>
-      </p:sp>
-      <p:sp>
-        <p:nvSpPr>
-          <p:cNvPr id="27" name="Rounded Rectangle 26"/>
-          <p:cNvSpPr/>
-          <p:nvPr/>
-        </p:nvSpPr>
-        <p:spPr>
-          <a:xfrm>
-            <a:off x="1847850" y="4114800"/>
-            <a:ext cx="8877300" cy="895350"/>
+          <p:cNvPr id="30" name="Rounded Rectangle 29"/>
+          <p:cNvSpPr/>
+          <p:nvPr/>
+        </p:nvSpPr>
+        <p:spPr>
+          <a:xfrm>
+            <a:off x="5743575" y="3943350"/>
+            <a:ext cx="704850" cy="171450"/>
           </a:xfrm>
           <a:prstGeom prst="roundRect">
             <a:avLst>
@@ -31160,45 +31178,86 @@
             </a:avLst>
           </a:prstGeom>
           <a:solidFill>
-            <a:srgbClr val="F1F5F9"/>
-          </a:solidFill>
-          <a:ln>
-            <a:noFill/>
-          </a:ln>
-          <a:effectLst/>
-        </p:spPr>
-        <p:style>
-          <a:lnRef idx="1">
-            <a:schemeClr val="accent1"/>
-          </a:lnRef>
-          <a:fillRef idx="3">
-            <a:schemeClr val="accent1"/>
-          </a:fillRef>
-          <a:effectRef idx="2">
-            <a:schemeClr val="accent1"/>
-          </a:effectRef>
-          <a:fontRef idx="minor">
-            <a:schemeClr val="lt1"/>
-          </a:fontRef>
-        </p:style>
-        <p:txBody>
-          <a:bodyPr rtlCol="0" anchor="ctr"/>
-          <a:lstStyle/>
-          <a:p>
-            <a:pPr algn="ctr"/>
-          </a:p>
-        </p:txBody>
-      </p:sp>
-      <p:sp>
-        <p:nvSpPr>
-          <p:cNvPr id="28" name="Rounded Rectangle 27"/>
-          <p:cNvSpPr/>
-          <p:nvPr/>
-        </p:nvSpPr>
-        <p:spPr>
-          <a:xfrm>
-            <a:off x="1905000" y="4152900"/>
-            <a:ext cx="8763000" cy="819150"/>
+            <a:srgbClr val="FFFFFF"/>
+          </a:solidFill>
+          <a:ln w="12700">
+            <a:solidFill>
+              <a:srgbClr val="DDE5EE"/>
+            </a:solidFill>
+          </a:ln>
+          <a:effectLst/>
+        </p:spPr>
+        <p:style>
+          <a:lnRef idx="1">
+            <a:schemeClr val="accent1"/>
+          </a:lnRef>
+          <a:fillRef idx="3">
+            <a:schemeClr val="accent1"/>
+          </a:fillRef>
+          <a:effectRef idx="2">
+            <a:schemeClr val="accent1"/>
+          </a:effectRef>
+          <a:fontRef idx="minor">
+            <a:schemeClr val="lt1"/>
+          </a:fontRef>
+        </p:style>
+        <p:txBody>
+          <a:bodyPr rtlCol="0" anchor="ctr"/>
+          <a:lstStyle/>
+          <a:p>
+            <a:pPr algn="ctr"/>
+          </a:p>
+        </p:txBody>
+      </p:sp>
+      <p:sp>
+        <p:nvSpPr>
+          <p:cNvPr id="31" name="TextBox 30"/>
+          <p:cNvSpPr txBox="1"/>
+          <p:nvPr/>
+        </p:nvSpPr>
+        <p:spPr>
+          <a:xfrm>
+            <a:off x="5743575" y="3943350"/>
+            <a:ext cx="704850" cy="171450"/>
+          </a:xfrm>
+          <a:prstGeom prst="rect">
+            <a:avLst/>
+          </a:prstGeom>
+          <a:noFill/>
+        </p:spPr>
+        <p:txBody>
+          <a:bodyPr wrap="square" anchor="ctr">
+            <a:spAutoFit/>
+          </a:bodyPr>
+          <a:lstStyle/>
+          <a:p>
+            <a:pPr algn="ctr">
+              <a:lnSpc>
+                <a:spcPct val="100000"/>
+              </a:lnSpc>
+            </a:pPr>
+            <a:r>
+              <a:rPr sz="1100" b="1">
+                <a:solidFill>
+                  <a:srgbClr val="0B1D3A"/>
+                </a:solidFill>
+                <a:latin typeface="PingFang SC"/>
+              </a:rPr>
+              <a:t>压缩</a:t>
+            </a:r>
+          </a:p>
+        </p:txBody>
+      </p:sp>
+      <p:sp>
+        <p:nvSpPr>
+          <p:cNvPr id="32" name="Rounded Rectangle 31"/>
+          <p:cNvSpPr/>
+          <p:nvPr/>
+        </p:nvSpPr>
+        <p:spPr>
+          <a:xfrm>
+            <a:off x="1847850" y="4114800"/>
+            <a:ext cx="8877300" cy="895350"/>
           </a:xfrm>
           <a:prstGeom prst="roundRect">
             <a:avLst>
@@ -31206,6 +31265,91 @@
             </a:avLst>
           </a:prstGeom>
           <a:solidFill>
+            <a:srgbClr val="F1F5F9"/>
+          </a:solidFill>
+          <a:ln>
+            <a:noFill/>
+          </a:ln>
+          <a:effectLst/>
+        </p:spPr>
+        <p:style>
+          <a:lnRef idx="1">
+            <a:schemeClr val="accent1"/>
+          </a:lnRef>
+          <a:fillRef idx="3">
+            <a:schemeClr val="accent1"/>
+          </a:fillRef>
+          <a:effectRef idx="2">
+            <a:schemeClr val="accent1"/>
+          </a:effectRef>
+          <a:fontRef idx="minor">
+            <a:schemeClr val="lt1"/>
+          </a:fontRef>
+        </p:style>
+        <p:txBody>
+          <a:bodyPr rtlCol="0" anchor="ctr"/>
+          <a:lstStyle/>
+          <a:p>
+            <a:pPr algn="ctr"/>
+          </a:p>
+        </p:txBody>
+      </p:sp>
+      <p:sp>
+        <p:nvSpPr>
+          <p:cNvPr id="33" name="TextBox 32"/>
+          <p:cNvSpPr txBox="1"/>
+          <p:nvPr/>
+        </p:nvSpPr>
+        <p:spPr>
+          <a:xfrm>
+            <a:off x="1962150" y="3886200"/>
+            <a:ext cx="1905000" cy="209550"/>
+          </a:xfrm>
+          <a:prstGeom prst="rect">
+            <a:avLst/>
+          </a:prstGeom>
+          <a:noFill/>
+        </p:spPr>
+        <p:txBody>
+          <a:bodyPr wrap="square" anchor="ctr">
+            <a:spAutoFit/>
+          </a:bodyPr>
+          <a:lstStyle/>
+          <a:p>
+            <a:pPr algn="l">
+              <a:lnSpc>
+                <a:spcPct val="100000"/>
+              </a:lnSpc>
+            </a:pPr>
+            <a:r>
+              <a:rPr sz="1100" b="1">
+                <a:solidFill>
+                  <a:srgbClr val="F59E0B"/>
+                </a:solidFill>
+                <a:latin typeface="PingFang SC"/>
+              </a:rPr>
+              <a:t>L4</a:t>
+            </a:r>
+          </a:p>
+        </p:txBody>
+      </p:sp>
+      <p:sp>
+        <p:nvSpPr>
+          <p:cNvPr id="34" name="Rounded Rectangle 33"/>
+          <p:cNvSpPr/>
+          <p:nvPr/>
+        </p:nvSpPr>
+        <p:spPr>
+          <a:xfrm>
+            <a:off x="1905000" y="4152900"/>
+            <a:ext cx="8763000" cy="819150"/>
+          </a:xfrm>
+          <a:prstGeom prst="roundRect">
+            <a:avLst>
+              <a:gd name="adj" fmla="val 8000"/>
+            </a:avLst>
+          </a:prstGeom>
+          <a:solidFill>
             <a:srgbClr val="FFFFFF"/>
           </a:solidFill>
           <a:ln w="12700">
@@ -31239,7 +31383,7 @@
       </p:sp>
       <p:sp>
         <p:nvSpPr>
-          <p:cNvPr id="29" name="Rectangle 28"/>
+          <p:cNvPr id="35" name="Rectangle 34"/>
           <p:cNvSpPr/>
           <p:nvPr/>
         </p:nvSpPr>
@@ -31283,35 +31427,35 @@
       </p:sp>
       <p:sp>
         <p:nvSpPr>
-          <p:cNvPr id="30" name="TextBox 29"/>
-          <p:cNvSpPr txBox="1"/>
-          <p:nvPr/>
-        </p:nvSpPr>
-        <p:spPr>
-          <a:xfrm>
-            <a:off x="2038350" y="4152900"/>
-            <a:ext cx="8534400" cy="819150"/>
-          </a:xfrm>
-          <a:prstGeom prst="rect">
-            <a:avLst/>
-          </a:prstGeom>
-          <a:noFill/>
-        </p:spPr>
-        <p:txBody>
-          <a:bodyPr wrap="square" anchor="ctr">
+          <p:cNvPr id="36" name="TextBox 35"/>
+          <p:cNvSpPr txBox="1"/>
+          <p:nvPr/>
+        </p:nvSpPr>
+        <p:spPr>
+          <a:xfrm>
+            <a:off x="2057400" y="4152900"/>
+            <a:ext cx="8496300" cy="819150"/>
+          </a:xfrm>
+          <a:prstGeom prst="rect">
+            <a:avLst/>
+          </a:prstGeom>
+          <a:noFill/>
+        </p:spPr>
+        <p:txBody>
+          <a:bodyPr wrap="none" anchor="ctr">
             <a:spAutoFit/>
           </a:bodyPr>
           <a:lstStyle/>
           <a:p>
             <a:pPr algn="l">
               <a:lnSpc>
-                <a:spcPct val="100000"/>
-              </a:lnSpc>
-            </a:pPr>
-            <a:r>
-              <a:rPr sz="1200" b="1">
-                <a:solidFill>
-                  <a:srgbClr val="475569"/>
+                <a:spcPct val="115000"/>
+              </a:lnSpc>
+            </a:pPr>
+            <a:r>
+              <a:rPr sz="1100" b="1">
+                <a:solidFill>
+                  <a:srgbClr val="0B1D3A"/>
                 </a:solidFill>
                 <a:latin typeface="PingFang SC"/>
               </a:rPr>
@@ -31322,7 +31466,7 @@
       </p:sp>
       <p:cxnSp>
         <p:nvCxnSpPr>
-          <p:cNvPr id="31" name="Connector 30"/>
+          <p:cNvPr id="37" name="Connector 36"/>
           <p:cNvCxnSpPr/>
           <p:nvPr/>
         </p:nvCxnSpPr>
@@ -31334,9 +31478,9 @@
           <a:prstGeom prst="line">
             <a:avLst/>
           </a:prstGeom>
-          <a:ln w="15240">
+          <a:ln w="17780">
             <a:solidFill>
-              <a:srgbClr val="94A3B8"/>
+              <a:srgbClr val="475569"/>
             </a:solidFill>
           </a:ln>
         </p:spPr>
@@ -31357,7 +31501,7 @@
       </p:cxnSp>
       <p:sp>
         <p:nvSpPr>
-          <p:cNvPr id="32" name="Isosceles Triangle 31"/>
+          <p:cNvPr id="38" name="Isosceles Triangle 37"/>
           <p:cNvSpPr/>
           <p:nvPr/>
         </p:nvSpPr>
@@ -31370,7 +31514,7 @@
             <a:avLst/>
           </a:prstGeom>
           <a:solidFill>
-            <a:srgbClr val="94A3B8"/>
+            <a:srgbClr val="475569"/>
           </a:solidFill>
           <a:ln>
             <a:noFill/>
@@ -31401,7 +31545,7 @@
       </p:sp>
       <p:sp>
         <p:nvSpPr>
-          <p:cNvPr id="33" name="Rounded Rectangle 32"/>
+          <p:cNvPr id="39" name="Rounded Rectangle 38"/>
           <p:cNvSpPr/>
           <p:nvPr/>
         </p:nvSpPr>
@@ -31447,7 +31591,46 @@
       </p:sp>
       <p:sp>
         <p:nvSpPr>
-          <p:cNvPr id="34" name="Rounded Rectangle 33"/>
+          <p:cNvPr id="40" name="TextBox 39"/>
+          <p:cNvSpPr txBox="1"/>
+          <p:nvPr/>
+        </p:nvSpPr>
+        <p:spPr>
+          <a:xfrm>
+            <a:off x="1962150" y="4953000"/>
+            <a:ext cx="1905000" cy="209550"/>
+          </a:xfrm>
+          <a:prstGeom prst="rect">
+            <a:avLst/>
+          </a:prstGeom>
+          <a:noFill/>
+        </p:spPr>
+        <p:txBody>
+          <a:bodyPr wrap="square" anchor="ctr">
+            <a:spAutoFit/>
+          </a:bodyPr>
+          <a:lstStyle/>
+          <a:p>
+            <a:pPr algn="l">
+              <a:lnSpc>
+                <a:spcPct val="100000"/>
+              </a:lnSpc>
+            </a:pPr>
+            <a:r>
+              <a:rPr sz="1100" b="1">
+                <a:solidFill>
+                  <a:srgbClr val="34D399"/>
+                </a:solidFill>
+                <a:latin typeface="PingFang SC"/>
+              </a:rPr>
+              <a:t>L5</a:t>
+            </a:r>
+          </a:p>
+        </p:txBody>
+      </p:sp>
+      <p:sp>
+        <p:nvSpPr>
+          <p:cNvPr id="41" name="Rounded Rectangle 40"/>
           <p:cNvSpPr/>
           <p:nvPr/>
         </p:nvSpPr>
@@ -31495,7 +31678,7 @@
       </p:sp>
       <p:sp>
         <p:nvSpPr>
-          <p:cNvPr id="35" name="Rectangle 34"/>
+          <p:cNvPr id="42" name="Rectangle 41"/>
           <p:cNvSpPr/>
           <p:nvPr/>
         </p:nvSpPr>
@@ -31539,46 +31722,46 @@
       </p:sp>
       <p:sp>
         <p:nvSpPr>
-          <p:cNvPr id="36" name="TextBox 35"/>
-          <p:cNvSpPr txBox="1"/>
-          <p:nvPr/>
-        </p:nvSpPr>
-        <p:spPr>
-          <a:xfrm>
-            <a:off x="2038350" y="5219700"/>
-            <a:ext cx="8534400" cy="819150"/>
-          </a:xfrm>
-          <a:prstGeom prst="rect">
-            <a:avLst/>
-          </a:prstGeom>
-          <a:noFill/>
-        </p:spPr>
-        <p:txBody>
-          <a:bodyPr wrap="square" anchor="ctr">
+          <p:cNvPr id="43" name="TextBox 42"/>
+          <p:cNvSpPr txBox="1"/>
+          <p:nvPr/>
+        </p:nvSpPr>
+        <p:spPr>
+          <a:xfrm>
+            <a:off x="2057400" y="5219700"/>
+            <a:ext cx="8496300" cy="819150"/>
+          </a:xfrm>
+          <a:prstGeom prst="rect">
+            <a:avLst/>
+          </a:prstGeom>
+          <a:noFill/>
+        </p:spPr>
+        <p:txBody>
+          <a:bodyPr wrap="none" anchor="ctr">
             <a:spAutoFit/>
           </a:bodyPr>
           <a:lstStyle/>
           <a:p>
             <a:pPr algn="l">
               <a:lnSpc>
-                <a:spcPct val="100000"/>
-              </a:lnSpc>
-            </a:pPr>
-            <a:r>
-              <a:rPr sz="1200" b="1">
-                <a:solidFill>
-                  <a:srgbClr val="475569"/>
-                </a:solidFill>
-                <a:latin typeface="PingFang SC"/>
-              </a:rPr>
-              <a:t>输出预留: 8k 生成空间|FitReport 记录压缩比</a:t>
-            </a:r>
-          </a:p>
-        </p:txBody>
-      </p:sp>
-      <p:sp>
-        <p:nvSpPr>
-          <p:cNvPr id="37" name="TextBox 36"/>
+                <a:spcPct val="115000"/>
+              </a:lnSpc>
+            </a:pPr>
+            <a:r>
+              <a:rPr sz="1100" b="1">
+                <a:solidFill>
+                  <a:srgbClr val="0B1D3A"/>
+                </a:solidFill>
+                <a:latin typeface="PingFang SC"/>
+              </a:rPr>
+              <a:t>输出预留: 8k 生成空间</a:t>
+            </a:r>
+          </a:p>
+        </p:txBody>
+      </p:sp>
+      <p:sp>
+        <p:nvSpPr>
+          <p:cNvPr id="44" name="TextBox 43"/>
           <p:cNvSpPr txBox="1"/>
           <p:nvPr/>
         </p:nvSpPr>
@@ -31617,7 +31800,7 @@
       </p:sp>
       <p:sp>
         <p:nvSpPr>
-          <p:cNvPr id="38" name="TextBox 37"/>
+          <p:cNvPr id="45" name="TextBox 44"/>
           <p:cNvSpPr txBox="1"/>
           <p:nvPr/>
         </p:nvSpPr>

--- a/03-课件PPT/讲次版/第4章-1-讲次 4-1 · Context Engineering.pptx
+++ b/03-课件PPT/讲次版/第4章-1-讲次 4-1 · Context Engineering.pptx
@@ -11665,7 +11665,7 @@
       </p:sp>
       <p:pic>
         <p:nvPicPr>
-          <p:cNvPr id="5" name="Picture 4" descr="chart_666083.png"/>
+          <p:cNvPr id="5" name="Picture 4" descr="chart_232847.png"/>
           <p:cNvPicPr>
             <a:picLocks noChangeAspect="1"/>
           </p:cNvPicPr>
@@ -23213,7 +23213,7 @@
       </p:sp>
       <p:pic>
         <p:nvPicPr>
-          <p:cNvPr id="5" name="Picture 4" descr="chart_850316.png"/>
+          <p:cNvPr id="5" name="Picture 4" descr="chart_365067.png"/>
           <p:cNvPicPr>
             <a:picLocks noChangeAspect="1"/>
           </p:cNvPicPr>
@@ -30296,7 +30296,7 @@
           <a:noFill/>
         </p:spPr>
         <p:txBody>
-          <a:bodyPr wrap="none" anchor="ctr">
+          <a:bodyPr wrap="square" anchor="ctr">
             <a:spAutoFit/>
           </a:bodyPr>
           <a:lstStyle/>
@@ -30307,7 +30307,7 @@
               </a:lnSpc>
             </a:pPr>
             <a:r>
-              <a:rPr sz="1100" b="1">
+              <a:rPr sz="1300" b="1">
                 <a:solidFill>
                   <a:srgbClr val="0B1D3A"/>
                 </a:solidFill>
@@ -30678,7 +30678,7 @@
           <a:noFill/>
         </p:spPr>
         <p:txBody>
-          <a:bodyPr wrap="none" anchor="ctr">
+          <a:bodyPr wrap="square" anchor="ctr">
             <a:spAutoFit/>
           </a:bodyPr>
           <a:lstStyle/>
@@ -30689,7 +30689,7 @@
               </a:lnSpc>
             </a:pPr>
             <a:r>
-              <a:rPr sz="1100" b="1">
+              <a:rPr sz="1300" b="1">
                 <a:solidFill>
                   <a:srgbClr val="0B1D3A"/>
                 </a:solidFill>
@@ -31060,7 +31060,7 @@
           <a:noFill/>
         </p:spPr>
         <p:txBody>
-          <a:bodyPr wrap="none" anchor="ctr">
+          <a:bodyPr wrap="square" anchor="ctr">
             <a:spAutoFit/>
           </a:bodyPr>
           <a:lstStyle/>
@@ -31442,7 +31442,7 @@
           <a:noFill/>
         </p:spPr>
         <p:txBody>
-          <a:bodyPr wrap="none" anchor="ctr">
+          <a:bodyPr wrap="square" anchor="ctr">
             <a:spAutoFit/>
           </a:bodyPr>
           <a:lstStyle/>
@@ -31453,7 +31453,7 @@
               </a:lnSpc>
             </a:pPr>
             <a:r>
-              <a:rPr sz="1100" b="1">
+              <a:rPr sz="1300" b="1">
                 <a:solidFill>
                   <a:srgbClr val="0B1D3A"/>
                 </a:solidFill>
@@ -31737,7 +31737,7 @@
           <a:noFill/>
         </p:spPr>
         <p:txBody>
-          <a:bodyPr wrap="none" anchor="ctr">
+          <a:bodyPr wrap="square" anchor="ctr">
             <a:spAutoFit/>
           </a:bodyPr>
           <a:lstStyle/>
@@ -31748,7 +31748,7 @@
               </a:lnSpc>
             </a:pPr>
             <a:r>
-              <a:rPr sz="1100" b="1">
+              <a:rPr sz="1300" b="1">
                 <a:solidFill>
                   <a:srgbClr val="0B1D3A"/>
                 </a:solidFill>
